--- a/assets/powerpoints/module-n3-epicerie/E2-je-retiens-des-mots.pptx
+++ b/assets/powerpoints/module-n3-epicerie/E2-je-retiens-des-mots.pptx
@@ -4219,7 +4219,7 @@
             <a:r>
               <a:rPr sz="1300" b="1" i="0" spc="156">
                 <a:solidFill>
-                  <a:srgbClr val="166534"/>
+                  <a:srgbClr val="A5335F"/>
                 </a:solidFill>
                 <a:latin typeface="Verdana"/>
               </a:rPr>
@@ -5188,7 +5188,7 @@
             <a:r>
               <a:rPr sz="1300" b="1" i="0" spc="156">
                 <a:solidFill>
-                  <a:srgbClr val="166534"/>
+                  <a:srgbClr val="A5335F"/>
                 </a:solidFill>
                 <a:latin typeface="Verdana"/>
               </a:rPr>
@@ -5299,7 +5299,7 @@
             </a:avLst>
           </a:prstGeom>
           <a:solidFill>
-            <a:srgbClr val="E3F1E7"/>
+            <a:srgbClr val="FCE9F0"/>
           </a:solidFill>
           <a:ln>
             <a:noFill/>
@@ -5356,7 +5356,7 @@
             <a:r>
               <a:rPr sz="1500" b="1" i="0">
                 <a:solidFill>
-                  <a:srgbClr val="166534"/>
+                  <a:srgbClr val="A5335F"/>
                 </a:solidFill>
                 <a:latin typeface="Verdana"/>
               </a:rPr>
@@ -5467,7 +5467,7 @@
             </a:avLst>
           </a:prstGeom>
           <a:solidFill>
-            <a:srgbClr val="E3F1E7"/>
+            <a:srgbClr val="FCE9F0"/>
           </a:solidFill>
           <a:ln>
             <a:noFill/>
@@ -5524,7 +5524,7 @@
             <a:r>
               <a:rPr sz="1500" b="1" i="0">
                 <a:solidFill>
-                  <a:srgbClr val="166534"/>
+                  <a:srgbClr val="A5335F"/>
                 </a:solidFill>
                 <a:latin typeface="Verdana"/>
               </a:rPr>
@@ -5635,7 +5635,7 @@
             </a:avLst>
           </a:prstGeom>
           <a:solidFill>
-            <a:srgbClr val="E3F1E7"/>
+            <a:srgbClr val="FCE9F0"/>
           </a:solidFill>
           <a:ln>
             <a:noFill/>
@@ -5692,7 +5692,7 @@
             <a:r>
               <a:rPr sz="1500" b="1" i="0">
                 <a:solidFill>
-                  <a:srgbClr val="166534"/>
+                  <a:srgbClr val="A5335F"/>
                 </a:solidFill>
                 <a:latin typeface="Verdana"/>
               </a:rPr>
@@ -5803,7 +5803,7 @@
             </a:avLst>
           </a:prstGeom>
           <a:solidFill>
-            <a:srgbClr val="E3F1E7"/>
+            <a:srgbClr val="FCE9F0"/>
           </a:solidFill>
           <a:ln>
             <a:noFill/>
@@ -5860,7 +5860,7 @@
             <a:r>
               <a:rPr sz="1500" b="1" i="0">
                 <a:solidFill>
-                  <a:srgbClr val="166534"/>
+                  <a:srgbClr val="A5335F"/>
                 </a:solidFill>
                 <a:latin typeface="Verdana"/>
               </a:rPr>
@@ -6076,7 +6076,7 @@
             <a:r>
               <a:rPr sz="1300" b="1" i="0" spc="156">
                 <a:solidFill>
-                  <a:srgbClr val="166534"/>
+                  <a:srgbClr val="A5335F"/>
                 </a:solidFill>
                 <a:latin typeface="Verdana"/>
               </a:rPr>
@@ -6896,7 +6896,7 @@
             <a:r>
               <a:rPr sz="1300" b="1" i="0" spc="156">
                 <a:solidFill>
-                  <a:srgbClr val="166534"/>
+                  <a:srgbClr val="A5335F"/>
                 </a:solidFill>
                 <a:latin typeface="Verdana"/>
               </a:rPr>
@@ -7836,7 +7836,7 @@
             <a:r>
               <a:rPr sz="1300" b="1" i="0" spc="156">
                 <a:solidFill>
-                  <a:srgbClr val="166534"/>
+                  <a:srgbClr val="A5335F"/>
                 </a:solidFill>
                 <a:latin typeface="Verdana"/>
               </a:rPr>
@@ -8536,7 +8536,7 @@
             <a:r>
               <a:rPr sz="1300" b="1" i="0" spc="156">
                 <a:solidFill>
-                  <a:srgbClr val="166534"/>
+                  <a:srgbClr val="A5335F"/>
                 </a:solidFill>
                 <a:latin typeface="Verdana"/>
               </a:rPr>
@@ -8738,7 +8738,7 @@
             <a:r>
               <a:rPr sz="1800" b="1" i="0">
                 <a:solidFill>
-                  <a:srgbClr val="166534"/>
+                  <a:srgbClr val="A5335F"/>
                 </a:solidFill>
                 <a:latin typeface="Verdana"/>
               </a:rPr>
@@ -8858,7 +8858,7 @@
             <a:r>
               <a:rPr sz="1800" b="1" i="0">
                 <a:solidFill>
-                  <a:srgbClr val="166534"/>
+                  <a:srgbClr val="A5335F"/>
                 </a:solidFill>
                 <a:latin typeface="Verdana"/>
               </a:rPr>
@@ -8978,7 +8978,7 @@
             <a:r>
               <a:rPr sz="1800" b="1" i="0">
                 <a:solidFill>
-                  <a:srgbClr val="166534"/>
+                  <a:srgbClr val="A5335F"/>
                 </a:solidFill>
                 <a:latin typeface="Verdana"/>
               </a:rPr>
@@ -9279,7 +9279,7 @@
             <a:r>
               <a:rPr sz="1300" b="1" i="0" spc="156">
                 <a:solidFill>
-                  <a:srgbClr val="166534"/>
+                  <a:srgbClr val="A5335F"/>
                 </a:solidFill>
                 <a:latin typeface="Verdana"/>
               </a:rPr>
@@ -9520,7 +9520,7 @@
             <a:r>
               <a:rPr sz="1800" b="1" i="0">
                 <a:solidFill>
-                  <a:srgbClr val="166534"/>
+                  <a:srgbClr val="A5335F"/>
                 </a:solidFill>
                 <a:latin typeface="Verdana"/>
               </a:rPr>
@@ -9640,7 +9640,7 @@
             <a:r>
               <a:rPr sz="1800" b="1" i="0">
                 <a:solidFill>
-                  <a:srgbClr val="166534"/>
+                  <a:srgbClr val="A5335F"/>
                 </a:solidFill>
                 <a:latin typeface="Verdana"/>
               </a:rPr>
@@ -9760,7 +9760,7 @@
             <a:r>
               <a:rPr sz="1800" b="1" i="0">
                 <a:solidFill>
-                  <a:srgbClr val="166534"/>
+                  <a:srgbClr val="A5335F"/>
                 </a:solidFill>
                 <a:latin typeface="Verdana"/>
               </a:rPr>
@@ -9937,7 +9937,7 @@
             <a:r>
               <a:rPr sz="1300" b="1" i="0" spc="156">
                 <a:solidFill>
-                  <a:srgbClr val="166534"/>
+                  <a:srgbClr val="A5335F"/>
                 </a:solidFill>
                 <a:latin typeface="Verdana"/>
               </a:rPr>
@@ -9963,7 +9963,7 @@
             </a:avLst>
           </a:prstGeom>
           <a:solidFill>
-            <a:srgbClr val="E3F1E7"/>
+            <a:srgbClr val="FCE9F0"/>
           </a:solidFill>
           <a:ln w="12700">
             <a:solidFill>
@@ -10284,7 +10284,7 @@
             <a:r>
               <a:rPr sz="1300" b="1" i="0" spc="156">
                 <a:solidFill>
-                  <a:srgbClr val="166534"/>
+                  <a:srgbClr val="A5335F"/>
                 </a:solidFill>
                 <a:latin typeface="Verdana"/>
               </a:rPr>
@@ -10408,7 +10408,7 @@
             <a:r>
               <a:rPr sz="2100" b="1" i="0">
                 <a:solidFill>
-                  <a:srgbClr val="166534"/>
+                  <a:srgbClr val="A5335F"/>
                 </a:solidFill>
                 <a:latin typeface="Verdana"/>
               </a:rPr>
@@ -10532,7 +10532,7 @@
             <a:r>
               <a:rPr sz="2100" b="1" i="0">
                 <a:solidFill>
-                  <a:srgbClr val="166534"/>
+                  <a:srgbClr val="A5335F"/>
                 </a:solidFill>
                 <a:latin typeface="Verdana"/>
               </a:rPr>
@@ -10656,7 +10656,7 @@
             <a:r>
               <a:rPr sz="2100" b="1" i="0">
                 <a:solidFill>
-                  <a:srgbClr val="166534"/>
+                  <a:srgbClr val="A5335F"/>
                 </a:solidFill>
                 <a:latin typeface="Verdana"/>
               </a:rPr>

--- a/assets/powerpoints/module-n3-epicerie/E2-je-retiens-des-mots.pptx
+++ b/assets/powerpoints/module-n3-epicerie/E2-je-retiens-des-mots.pptx
@@ -10699,7 +10699,7 @@
                 </a:solidFill>
                 <a:latin typeface="Verdana"/>
               </a:rPr>
-              <a:t>Six panneaux « En apprendre plus », avec de l'audio. Ils restent accessibles après la fin du module.</a:t>
+              <a:t>Six panneaux « Ouvrir la mini-leçon », avec de l'audio. Ils restent accessibles après la fin du module.</a:t>
             </a:r>
           </a:p>
         </p:txBody>
